--- a/PRESENTATION.pptx
+++ b/PRESENTATION.pptx
@@ -1605,7 +1605,7 @@
                 <a:ea typeface="Calibri" pitchFamily="34" charset="-122"/>
                 <a:cs typeface="Calibri" pitchFamily="34" charset="-120"/>
               </a:rPr>
-              <a:t>Team name  ·  Members  ·  29 August 2026</a:t>
+              <a:t>Team ASTITWA  ·  Tanishq Aryan  ·  29 August 2026</a:t>
             </a:r>
             <a:endParaRPr lang="en-US" sz="1200" dirty="0"/>
           </a:p>

--- a/PRESENTATION.pptx
+++ b/PRESENTATION.pptx
@@ -12,9 +12,10 @@
     <p:sldId id="260" r:id="rId6"/>
     <p:sldId id="261" r:id="rId7"/>
     <p:sldId id="262" r:id="rId8"/>
+    <p:sldId id="263" r:id="rId9"/>
   </p:sldIdLst>
   <p:notesMasterIdLst>
-    <p:notesMasterId r:id="rId9"/>
+    <p:notesMasterId r:id="rId10"/>
   </p:notesMasterIdLst>
   <p:sldSz cx="12192000" cy="6858000"/>
   <p:notesSz cx="6858000" cy="12192000"/>
@@ -1036,7 +1037,7 @@
           <a:p>
             <a:r>
               <a:rPr lang="en-US" dirty="0"/>
-              <a:t>Close on scope. The rubric rewards Feasibility and being well-scoped -- staying inside the boundary deliberately is the answer, not an apology.</a:t>
+              <a:t>We found this because our first table showed noise making QAOA BETTER, which is impossible -- so the metric had to be wrong. Anyone reporting that their variational circuit shrugged off 2% gate error is probably reading the same statistic.</a:t>
             </a:r>
             <a:endParaRPr lang="en-US" dirty="0"/>
           </a:p>
@@ -1060,6 +1061,94 @@
             <a:fld id="{F7021451-1387-4CA6-816F-3879F97B5CBC}" type="slidenum">
               <a:rPr lang="en-US"/>
               <a:t>7</a:t>
+            </a:fld>
+            <a:endParaRPr lang="en-US"/>
+          </a:p>
+        </p:txBody>
+      </p:sp>
+    </p:spTree>
+    <p:extLst>
+      <p:ext uri="{BB962C8B-B14F-4D97-AF65-F5344CB8AC3E}">
+        <p14:creationId xmlns:p14="http://schemas.microsoft.com/office/powerpoint/2010/main" val="1024086991"/>
+      </p:ext>
+    </p:extLst>
+  </p:cSld>
+  <p:clrMapOvr>
+    <a:masterClrMapping/>
+  </p:clrMapOvr>
+</p:notes>
+</file>
+
+<file path=ppt/notesSlides/notesSlide8.xml><?xml version="1.0" encoding="utf-8"?>
+<p:notes xmlns:a="http://schemas.openxmlformats.org/drawingml/2006/main" xmlns:r="http://schemas.openxmlformats.org/officeDocument/2006/relationships" xmlns:p="http://schemas.openxmlformats.org/presentationml/2006/main">
+  <p:cSld>
+    <p:spTree>
+      <p:nvGrpSpPr>
+        <p:cNvPr id="1" name=""/>
+        <p:cNvGrpSpPr/>
+        <p:nvPr/>
+      </p:nvGrpSpPr>
+      <p:grpSpPr>
+        <a:xfrm>
+          <a:off x="0" y="0"/>
+          <a:ext cx="0" cy="0"/>
+          <a:chOff x="0" y="0"/>
+          <a:chExt cx="0" cy="0"/>
+        </a:xfrm>
+      </p:grpSpPr>
+      <p:sp>
+        <p:nvSpPr>
+          <p:cNvPr id="2" name="Slide Image Placeholder 1"/>
+          <p:cNvSpPr>
+            <a:spLocks noGrp="1" noRot="1" noChangeAspect="1"/>
+          </p:cNvSpPr>
+          <p:nvPr>
+            <p:ph type="sldImg"/>
+          </p:nvPr>
+        </p:nvSpPr>
+        <p:spPr/>
+      </p:sp>
+      <p:sp>
+        <p:nvSpPr>
+          <p:cNvPr id="3" name="Notes Placeholder 2"/>
+          <p:cNvSpPr>
+            <a:spLocks noGrp="1"/>
+          </p:cNvSpPr>
+          <p:nvPr>
+            <p:ph type="body" idx="1"/>
+          </p:nvPr>
+        </p:nvSpPr>
+        <p:spPr/>
+        <p:txBody>
+          <a:bodyPr/>
+          <a:lstStyle/>
+          <a:p>
+            <a:r>
+              <a:rPr lang="en-US" dirty="0"/>
+              <a:t>Close on scope. The rubric rewards Feasibility and being well-scoped -- staying inside the boundary deliberately is the answer, not an apology.</a:t>
+            </a:r>
+            <a:endParaRPr lang="en-US" dirty="0"/>
+          </a:p>
+        </p:txBody>
+      </p:sp>
+      <p:sp>
+        <p:nvSpPr>
+          <p:cNvPr id="4" name="Slide Number Placeholder 3"/>
+          <p:cNvSpPr>
+            <a:spLocks noGrp="1"/>
+          </p:cNvSpPr>
+          <p:nvPr>
+            <p:ph type="sldNum" sz="quarter" idx="10"/>
+          </p:nvPr>
+        </p:nvSpPr>
+        <p:spPr/>
+        <p:txBody>
+          <a:bodyPr/>
+          <a:lstStyle/>
+          <a:p>
+            <a:fld id="{F7021451-1387-4CA6-816F-3879F97B5CBC}" type="slidenum">
+              <a:rPr lang="en-US"/>
+              <a:t>8</a:t>
             </a:fld>
             <a:endParaRPr lang="en-US"/>
           </a:p>
@@ -5287,6 +5376,526 @@
 <file path=ppt/slides/slide7.xml><?xml version="1.0" encoding="utf-8"?>
 <p:sld xmlns:a="http://schemas.openxmlformats.org/drawingml/2006/main" xmlns:r="http://schemas.openxmlformats.org/officeDocument/2006/relationships" xmlns:p="http://schemas.openxmlformats.org/presentationml/2006/main">
   <p:cSld name="Slide 7">
+    <p:spTree>
+      <p:nvGrpSpPr>
+        <p:cNvPr id="1" name=""/>
+        <p:cNvGrpSpPr/>
+        <p:nvPr/>
+      </p:nvGrpSpPr>
+      <p:grpSpPr>
+        <a:xfrm>
+          <a:off x="0" y="0"/>
+          <a:ext cx="0" cy="0"/>
+          <a:chOff x="0" y="0"/>
+          <a:chExt cx="0" cy="0"/>
+        </a:xfrm>
+      </p:grpSpPr>
+      <p:sp>
+        <p:nvSpPr>
+          <p:cNvPr id="2" name="Text 0"/>
+          <p:cNvSpPr txBox="1"/>
+          <p:nvPr/>
+        </p:nvSpPr>
+        <p:spPr>
+          <a:xfrm>
+            <a:off x="548640" y="457200"/>
+            <a:ext cx="10058400" cy="237744"/>
+          </a:xfrm>
+          <a:prstGeom prst="rect">
+            <a:avLst/>
+          </a:prstGeom>
+          <a:noFill/>
+          <a:ln/>
+        </p:spPr>
+        <p:txBody>
+          <a:bodyPr wrap="square" lIns="0" tIns="0" rIns="0" bIns="0" rtlCol="0" anchor="ctr"/>
+          <a:lstStyle/>
+          <a:p>
+            <a:pPr indent="0" marL="0">
+              <a:buNone/>
+            </a:pPr>
+            <a:r>
+              <a:rPr lang="en-US" sz="1100" b="1" spc="200" kern="0" dirty="0">
+                <a:solidFill>
+                  <a:srgbClr val="E8833A"/>
+                </a:solidFill>
+                <a:latin typeface="Calibri" pitchFamily="34" charset="0"/>
+                <a:ea typeface="Calibri" pitchFamily="34" charset="-122"/>
+                <a:cs typeface="Calibri" pitchFamily="34" charset="-120"/>
+              </a:rPr>
+              <a:t>AND THE METRIC THAT LIED TO US</a:t>
+            </a:r>
+            <a:endParaRPr lang="en-US" sz="1100" dirty="0"/>
+          </a:p>
+        </p:txBody>
+      </p:sp>
+      <p:sp>
+        <p:nvSpPr>
+          <p:cNvPr id="3" name="Text 1"/>
+          <p:cNvSpPr txBox="1"/>
+          <p:nvPr/>
+        </p:nvSpPr>
+        <p:spPr>
+          <a:xfrm>
+            <a:off x="548640" y="722376"/>
+            <a:ext cx="11064240" cy="658368"/>
+          </a:xfrm>
+          <a:prstGeom prst="rect">
+            <a:avLst/>
+          </a:prstGeom>
+          <a:noFill/>
+          <a:ln/>
+        </p:spPr>
+        <p:txBody>
+          <a:bodyPr wrap="square" lIns="0" tIns="0" rIns="0" bIns="0" rtlCol="0" anchor="ctr"/>
+          <a:lstStyle/>
+          <a:p>
+            <a:pPr indent="0" marL="0">
+              <a:buNone/>
+            </a:pPr>
+            <a:r>
+              <a:rPr lang="en-US" sz="3000" b="1" dirty="0">
+                <a:solidFill>
+                  <a:srgbClr val="1E2761"/>
+                </a:solidFill>
+                <a:latin typeface="Cambria" pitchFamily="34" charset="0"/>
+                <a:ea typeface="Cambria" pitchFamily="34" charset="-122"/>
+                <a:cs typeface="Cambria" pitchFamily="34" charset="-120"/>
+              </a:rPr>
+              <a:t>Would this survive on real hardware?</a:t>
+            </a:r>
+            <a:endParaRPr lang="en-US" sz="3000" dirty="0"/>
+          </a:p>
+        </p:txBody>
+      </p:sp>
+      <p:pic>
+        <p:nvPicPr>
+          <p:cNvPr id="4" name="Image 0" descr="C:\Users\tanis\quantum\artifacts\figures\noise.png">    </p:cNvPr>
+          <p:cNvPicPr>
+            <a:picLocks noChangeAspect="1"/>
+          </p:cNvPicPr>
+          <p:nvPr/>
+        </p:nvPicPr>
+        <p:blipFill>
+          <a:blip r:embed="rId1"/>
+          <a:stretch>
+            <a:fillRect/>
+          </a:stretch>
+        </p:blipFill>
+        <p:spPr>
+          <a:xfrm>
+            <a:off x="548640" y="1572768"/>
+            <a:ext cx="5943600" cy="3456432"/>
+          </a:xfrm>
+          <a:prstGeom prst="rect">
+            <a:avLst/>
+          </a:prstGeom>
+        </p:spPr>
+      </p:pic>
+      <p:sp>
+        <p:nvSpPr>
+          <p:cNvPr id="5" name="Text 2"/>
+          <p:cNvSpPr txBox="1"/>
+          <p:nvPr/>
+        </p:nvSpPr>
+        <p:spPr>
+          <a:xfrm>
+            <a:off x="6858000" y="1627632"/>
+            <a:ext cx="4754880" cy="329184"/>
+          </a:xfrm>
+          <a:prstGeom prst="rect">
+            <a:avLst/>
+          </a:prstGeom>
+          <a:noFill/>
+          <a:ln/>
+        </p:spPr>
+        <p:txBody>
+          <a:bodyPr wrap="square" lIns="0" tIns="0" rIns="0" bIns="0" rtlCol="0" anchor="ctr"/>
+          <a:lstStyle/>
+          <a:p>
+            <a:pPr indent="0" marL="0">
+              <a:buNone/>
+            </a:pPr>
+            <a:r>
+              <a:rPr lang="en-US" sz="1400" b="1" dirty="0">
+                <a:solidFill>
+                  <a:srgbClr val="1E2761"/>
+                </a:solidFill>
+                <a:latin typeface="Calibri" pitchFamily="34" charset="0"/>
+                <a:ea typeface="Calibri" pitchFamily="34" charset="-122"/>
+                <a:cs typeface="Calibri" pitchFamily="34" charset="-120"/>
+              </a:rPr>
+              <a:t>Best-of-2048-shots says yes. It is wrong.</a:t>
+            </a:r>
+            <a:endParaRPr lang="en-US" sz="1400" dirty="0"/>
+          </a:p>
+        </p:txBody>
+      </p:sp>
+      <p:sp>
+        <p:nvSpPr>
+          <p:cNvPr id="6" name="Text 3"/>
+          <p:cNvSpPr txBox="1"/>
+          <p:nvPr/>
+        </p:nvSpPr>
+        <p:spPr>
+          <a:xfrm>
+            <a:off x="6858000" y="2029968"/>
+            <a:ext cx="4754880" cy="1371600"/>
+          </a:xfrm>
+          <a:prstGeom prst="rect">
+            <a:avLst/>
+          </a:prstGeom>
+          <a:noFill/>
+          <a:ln/>
+        </p:spPr>
+        <p:txBody>
+          <a:bodyPr wrap="square" lIns="0" tIns="0" rIns="0" bIns="0" rtlCol="0" anchor="ctr"/>
+          <a:lstStyle/>
+          <a:p>
+            <a:pPr indent="0" marL="0">
+              <a:buNone/>
+            </a:pPr>
+            <a:r>
+              <a:rPr lang="en-US" sz="1150" dirty="0">
+                <a:solidFill>
+                  <a:srgbClr val="5A5A6E"/>
+                </a:solidFill>
+                <a:latin typeface="Calibri" pitchFamily="34" charset="0"/>
+                <a:ea typeface="Calibri" pitchFamily="34" charset="-122"/>
+                <a:cs typeface="Calibri" pitchFamily="34" charset="-120"/>
+              </a:rPr>
+              <a:t>The default readout returns the exact optimum even at 2% depolarizing error across 182 two-qubit gates — a regime where no coherent signal should survive. At 12 qubits a near-uniform distribution still lands on the optimum by chance within 2048 draws. That is an artifact of the statistic, not robustness of the algorithm.</a:t>
+            </a:r>
+            <a:endParaRPr lang="en-US" sz="1150" dirty="0"/>
+          </a:p>
+        </p:txBody>
+      </p:sp>
+      <p:sp>
+        <p:nvSpPr>
+          <p:cNvPr id="7" name="Shape 4"/>
+          <p:cNvSpPr/>
+          <p:nvPr/>
+        </p:nvSpPr>
+        <p:spPr>
+          <a:xfrm>
+            <a:off x="6858000" y="3520440"/>
+            <a:ext cx="2286000" cy="1152144"/>
+          </a:xfrm>
+          <a:prstGeom prst="roundRect">
+            <a:avLst>
+              <a:gd name="adj" fmla="val 7143"/>
+            </a:avLst>
+          </a:prstGeom>
+          <a:solidFill>
+            <a:srgbClr val="F4F6FC"/>
+          </a:solidFill>
+          <a:ln w="12700">
+            <a:solidFill>
+              <a:srgbClr val="F4F6FC"/>
+            </a:solidFill>
+            <a:prstDash val="solid"/>
+          </a:ln>
+        </p:spPr>
+      </p:sp>
+      <p:sp>
+        <p:nvSpPr>
+          <p:cNvPr id="8" name="Text 5"/>
+          <p:cNvSpPr txBox="1"/>
+          <p:nvPr/>
+        </p:nvSpPr>
+        <p:spPr>
+          <a:xfrm>
+            <a:off x="7022592" y="3648456"/>
+            <a:ext cx="1956816" cy="566928"/>
+          </a:xfrm>
+          <a:prstGeom prst="rect">
+            <a:avLst/>
+          </a:prstGeom>
+          <a:noFill/>
+          <a:ln/>
+        </p:spPr>
+        <p:txBody>
+          <a:bodyPr wrap="square" lIns="0" tIns="0" rIns="0" bIns="0" rtlCol="0" anchor="ctr"/>
+          <a:lstStyle/>
+          <a:p>
+            <a:pPr indent="0" marL="0">
+              <a:buNone/>
+            </a:pPr>
+            <a:r>
+              <a:rPr lang="en-US" sz="3000" b="1" dirty="0">
+                <a:solidFill>
+                  <a:srgbClr val="E8833A"/>
+                </a:solidFill>
+                <a:latin typeface="Cambria" pitchFamily="34" charset="0"/>
+                <a:ea typeface="Cambria" pitchFamily="34" charset="-122"/>
+                <a:cs typeface="Cambria" pitchFamily="34" charset="-120"/>
+              </a:rPr>
+              <a:t>7×</a:t>
+            </a:r>
+            <a:endParaRPr lang="en-US" sz="3000" dirty="0"/>
+          </a:p>
+        </p:txBody>
+      </p:sp>
+      <p:sp>
+        <p:nvSpPr>
+          <p:cNvPr id="9" name="Text 6"/>
+          <p:cNvSpPr txBox="1"/>
+          <p:nvPr/>
+        </p:nvSpPr>
+        <p:spPr>
+          <a:xfrm>
+            <a:off x="7022592" y="4233672"/>
+            <a:ext cx="1956816" cy="347472"/>
+          </a:xfrm>
+          <a:prstGeom prst="rect">
+            <a:avLst/>
+          </a:prstGeom>
+          <a:noFill/>
+          <a:ln/>
+        </p:spPr>
+        <p:txBody>
+          <a:bodyPr wrap="square" lIns="0" tIns="0" rIns="0" bIns="0" rtlCol="0" anchor="ctr"/>
+          <a:lstStyle/>
+          <a:p>
+            <a:pPr indent="0" marL="0">
+              <a:buNone/>
+            </a:pPr>
+            <a:r>
+              <a:rPr lang="en-US" sz="1100" dirty="0">
+                <a:solidFill>
+                  <a:srgbClr val="5A5A6E"/>
+                </a:solidFill>
+                <a:latin typeface="Calibri" pitchFamily="34" charset="0"/>
+                <a:ea typeface="Calibri" pitchFamily="34" charset="-122"/>
+                <a:cs typeface="Calibri" pitchFamily="34" charset="-120"/>
+              </a:rPr>
+              <a:t>Scatter exceeds the trend</a:t>
+            </a:r>
+            <a:endParaRPr lang="en-US" sz="1100" dirty="0"/>
+          </a:p>
+        </p:txBody>
+      </p:sp>
+      <p:sp>
+        <p:nvSpPr>
+          <p:cNvPr id="10" name="Shape 7"/>
+          <p:cNvSpPr/>
+          <p:nvPr/>
+        </p:nvSpPr>
+        <p:spPr>
+          <a:xfrm>
+            <a:off x="9326880" y="3520440"/>
+            <a:ext cx="2286000" cy="1463040"/>
+          </a:xfrm>
+          <a:prstGeom prst="roundRect">
+            <a:avLst>
+              <a:gd name="adj" fmla="val 5625"/>
+            </a:avLst>
+          </a:prstGeom>
+          <a:solidFill>
+            <a:srgbClr val="F4F6FC"/>
+          </a:solidFill>
+          <a:ln w="12700">
+            <a:solidFill>
+              <a:srgbClr val="F4F6FC"/>
+            </a:solidFill>
+            <a:prstDash val="solid"/>
+          </a:ln>
+        </p:spPr>
+      </p:sp>
+      <p:sp>
+        <p:nvSpPr>
+          <p:cNvPr id="11" name="Text 8"/>
+          <p:cNvSpPr txBox="1"/>
+          <p:nvPr/>
+        </p:nvSpPr>
+        <p:spPr>
+          <a:xfrm>
+            <a:off x="9491472" y="3648456"/>
+            <a:ext cx="1956816" cy="566928"/>
+          </a:xfrm>
+          <a:prstGeom prst="rect">
+            <a:avLst/>
+          </a:prstGeom>
+          <a:noFill/>
+          <a:ln/>
+        </p:spPr>
+        <p:txBody>
+          <a:bodyPr wrap="square" lIns="0" tIns="0" rIns="0" bIns="0" rtlCol="0" anchor="ctr"/>
+          <a:lstStyle/>
+          <a:p>
+            <a:pPr indent="0" marL="0">
+              <a:buNone/>
+            </a:pPr>
+            <a:r>
+              <a:rPr lang="en-US" sz="3000" b="1" dirty="0">
+                <a:solidFill>
+                  <a:srgbClr val="1E2761"/>
+                </a:solidFill>
+                <a:latin typeface="Cambria" pitchFamily="34" charset="0"/>
+                <a:ea typeface="Cambria" pitchFamily="34" charset="-122"/>
+                <a:cs typeface="Cambria" pitchFamily="34" charset="-120"/>
+              </a:rPr>
+              <a:t>220</a:t>
+            </a:r>
+            <a:endParaRPr lang="en-US" sz="3000" dirty="0"/>
+          </a:p>
+        </p:txBody>
+      </p:sp>
+      <p:sp>
+        <p:nvSpPr>
+          <p:cNvPr id="12" name="Text 9"/>
+          <p:cNvSpPr txBox="1"/>
+          <p:nvPr/>
+        </p:nvSpPr>
+        <p:spPr>
+          <a:xfrm>
+            <a:off x="9491472" y="4233672"/>
+            <a:ext cx="1956816" cy="347472"/>
+          </a:xfrm>
+          <a:prstGeom prst="rect">
+            <a:avLst/>
+          </a:prstGeom>
+          <a:noFill/>
+          <a:ln/>
+        </p:spPr>
+        <p:txBody>
+          <a:bodyPr wrap="square" lIns="0" tIns="0" rIns="0" bIns="0" rtlCol="0" anchor="ctr"/>
+          <a:lstStyle/>
+          <a:p>
+            <a:pPr indent="0" marL="0">
+              <a:buNone/>
+            </a:pPr>
+            <a:r>
+              <a:rPr lang="en-US" sz="1100" dirty="0">
+                <a:solidFill>
+                  <a:srgbClr val="5A5A6E"/>
+                </a:solidFill>
+                <a:latin typeface="Calibri" pitchFamily="34" charset="0"/>
+                <a:ea typeface="Calibri" pitchFamily="34" charset="-122"/>
+                <a:cs typeface="Calibri" pitchFamily="34" charset="-120"/>
+              </a:rPr>
+              <a:t>Seeds/level needed to resolve it</a:t>
+            </a:r>
+            <a:endParaRPr lang="en-US" sz="1100" dirty="0"/>
+          </a:p>
+        </p:txBody>
+      </p:sp>
+      <p:sp>
+        <p:nvSpPr>
+          <p:cNvPr id="13" name="Text 10"/>
+          <p:cNvSpPr txBox="1"/>
+          <p:nvPr/>
+        </p:nvSpPr>
+        <p:spPr>
+          <a:xfrm>
+            <a:off x="9491472" y="4617720"/>
+            <a:ext cx="1956816" cy="274320"/>
+          </a:xfrm>
+          <a:prstGeom prst="rect">
+            <a:avLst/>
+          </a:prstGeom>
+          <a:noFill/>
+          <a:ln/>
+        </p:spPr>
+        <p:txBody>
+          <a:bodyPr wrap="square" lIns="0" tIns="0" rIns="0" bIns="0" rtlCol="0" anchor="ctr"/>
+          <a:lstStyle/>
+          <a:p>
+            <a:pPr indent="0" marL="0">
+              <a:buNone/>
+            </a:pPr>
+            <a:r>
+              <a:rPr lang="en-US" sz="1000" i="1" dirty="0">
+                <a:solidFill>
+                  <a:srgbClr val="E8833A"/>
+                </a:solidFill>
+                <a:latin typeface="Calibri" pitchFamily="34" charset="0"/>
+                <a:ea typeface="Calibri" pitchFamily="34" charset="-122"/>
+                <a:cs typeface="Calibri" pitchFamily="34" charset="-120"/>
+              </a:rPr>
+              <a:t>~19 h of simulation</a:t>
+            </a:r>
+            <a:endParaRPr lang="en-US" sz="1000" dirty="0"/>
+          </a:p>
+        </p:txBody>
+      </p:sp>
+      <p:sp>
+        <p:nvSpPr>
+          <p:cNvPr id="14" name="Shape 11"/>
+          <p:cNvSpPr/>
+          <p:nvPr/>
+        </p:nvSpPr>
+        <p:spPr>
+          <a:xfrm>
+            <a:off x="6858000" y="5166360"/>
+            <a:ext cx="4754880" cy="868680"/>
+          </a:xfrm>
+          <a:prstGeom prst="roundRect">
+            <a:avLst>
+              <a:gd name="adj" fmla="val 9474"/>
+            </a:avLst>
+          </a:prstGeom>
+          <a:solidFill>
+            <a:srgbClr val="1E2761"/>
+          </a:solidFill>
+          <a:ln w="12700">
+            <a:solidFill>
+              <a:srgbClr val="1E2761"/>
+            </a:solidFill>
+            <a:prstDash val="solid"/>
+          </a:ln>
+        </p:spPr>
+      </p:sp>
+      <p:sp>
+        <p:nvSpPr>
+          <p:cNvPr id="15" name="Text 12"/>
+          <p:cNvSpPr txBox="1"/>
+          <p:nvPr/>
+        </p:nvSpPr>
+        <p:spPr>
+          <a:xfrm>
+            <a:off x="7077456" y="5330952"/>
+            <a:ext cx="4343400" cy="566928"/>
+          </a:xfrm>
+          <a:prstGeom prst="rect">
+            <a:avLst/>
+          </a:prstGeom>
+          <a:noFill/>
+          <a:ln/>
+        </p:spPr>
+        <p:txBody>
+          <a:bodyPr wrap="square" lIns="0" tIns="0" rIns="0" bIns="0" rtlCol="0" anchor="ctr"/>
+          <a:lstStyle/>
+          <a:p>
+            <a:pPr indent="0" marL="0">
+              <a:buNone/>
+            </a:pPr>
+            <a:r>
+              <a:rPr lang="en-US" sz="1100" i="1" dirty="0">
+                <a:solidFill>
+                  <a:srgbClr val="CADCFC"/>
+                </a:solidFill>
+                <a:latin typeface="Calibri" pitchFamily="34" charset="0"/>
+                <a:ea typeface="Calibri" pitchFamily="34" charset="-122"/>
+                <a:cs typeface="Calibri" pitchFamily="34" charset="-120"/>
+              </a:rPr>
+              <a:t>So we report the sweep as inconclusive. Drawing a tidy curve through five noisy points would have looked better and been unsupported.</a:t>
+            </a:r>
+            <a:endParaRPr lang="en-US" sz="1100" dirty="0"/>
+          </a:p>
+        </p:txBody>
+      </p:sp>
+    </p:spTree>
+  </p:cSld>
+  <p:clrMapOvr>
+    <a:masterClrMapping/>
+  </p:clrMapOvr>
+</p:sld>
+</file>
+
+<file path=ppt/slides/slide8.xml><?xml version="1.0" encoding="utf-8"?>
+<p:sld xmlns:a="http://schemas.openxmlformats.org/drawingml/2006/main" xmlns:r="http://schemas.openxmlformats.org/officeDocument/2006/relationships" xmlns:p="http://schemas.openxmlformats.org/presentationml/2006/main">
+  <p:cSld name="Slide 8">
     <p:bg>
       <p:bgPr>
         <a:solidFill>

--- a/PRESENTATION.pptx
+++ b/PRESENTATION.pptx
@@ -2476,7 +2476,7 @@
                 <a:ea typeface="Calibri" pitchFamily="34" charset="-122"/>
                 <a:cs typeface="Calibri" pitchFamily="34" charset="-120"/>
               </a:rPr>
-              <a:t>We claim no advantage at this scale. The crossover is hundreds of qubits.</a:t>
+              <a:t>We claim no advantage at this scale. Guerreschi &amp; Matsuura (Sci. Rep. 9:6903, 2019) put the crossover at hundreds of qubits.</a:t>
             </a:r>
             <a:endParaRPr lang="en-US" sz="1250" dirty="0"/>
           </a:p>

--- a/PRESENTATION.pptx
+++ b/PRESENTATION.pptx
@@ -773,7 +773,7 @@
           <a:p>
             <a:r>
               <a:rPr lang="en-US" dirty="0"/>
-              <a:t>This is the money shot. Toggle fairness live and let the numbers move. Flag that German Credit attribute 9 encodes marital status and sex jointly and its coding is disputed -- before a judge does.</a:t>
+              <a:t>This is the money shot. Toggle diversification and fairness live and let the numbers move. If asked why age rather than sex: sex is not recoverable from this dataset -- male singles and female non-singles share code A92, and A95 has zero rows here. Groemping (2019) documents the coding errors.</a:t>
             </a:r>
             <a:endParaRPr lang="en-US" dirty="0"/>
           </a:p>
@@ -2135,7 +2135,7 @@
                 <a:ea typeface="Calibri" pitchFamily="34" charset="-122"/>
                 <a:cs typeface="Calibri" pitchFamily="34" charset="-120"/>
               </a:rPr>
-              <a:t>14 qubits, 105 Pauli terms, transpiled depth 78, 182 two-qubit gates. We can point at a ZZ term and name the two applicants it couples.</a:t>
+              <a:t>14 qubits, ~100 Pauli terms, transpiled depth 78, 182 two-qubit gates. We can point at a ZZ term and name the two applicants it couples.</a:t>
             </a:r>
             <a:endParaRPr lang="en-US" sz="1150" dirty="0"/>
           </a:p>
@@ -2901,7 +2901,7 @@
                 <a:ea typeface="Calibri" pitchFamily="34" charset="-122"/>
                 <a:cs typeface="Calibri" pitchFamily="34" charset="-120"/>
               </a:rPr>
-              <a:t>AUC 0.777</a:t>
+              <a:t>AUC 0.780</a:t>
             </a:r>
             <a:endParaRPr lang="en-US" sz="1050" dirty="0"/>
           </a:p>
@@ -3670,7 +3670,7 @@
                 <a:ea typeface="Cambria" pitchFamily="34" charset="-122"/>
                 <a:cs typeface="Cambria" pitchFamily="34" charset="-120"/>
               </a:rPr>
-              <a:t>Fairness as a constraint, not a footnote</a:t>
+              <a:t>Diversification and fairness as constraints</a:t>
             </a:r>
             <a:endParaRPr lang="en-US" sz="3000" dirty="0"/>
           </a:p>
@@ -4263,7 +4263,7 @@
                 <a:ea typeface="Cambria" pitchFamily="34" charset="-122"/>
                 <a:cs typeface="Cambria" pitchFamily="34" charset="-120"/>
               </a:rPr>
-              <a:t>425×</a:t>
+              <a:t>125×</a:t>
             </a:r>
             <a:endParaRPr lang="en-US" sz="3000" dirty="0"/>
           </a:p>
@@ -4368,7 +4368,7 @@
                 <a:ea typeface="Cambria" pitchFamily="34" charset="-122"/>
                 <a:cs typeface="Cambria" pitchFamily="34" charset="-120"/>
               </a:rPr>
-              <a:t>0.9779</a:t>
+              <a:t>0.9789</a:t>
             </a:r>
             <a:endParaRPr lang="en-US" sz="3000" dirty="0"/>
           </a:p>
@@ -4473,7 +4473,7 @@
                 <a:ea typeface="Cambria" pitchFamily="34" charset="-122"/>
                 <a:cs typeface="Cambria" pitchFamily="34" charset="-120"/>
               </a:rPr>
-              <a:t>0.9921</a:t>
+              <a:t>0.9986</a:t>
             </a:r>
             <a:endParaRPr lang="en-US" sz="3000" dirty="0"/>
           </a:p>
@@ -4578,7 +4578,7 @@
                 <a:ea typeface="Cambria" pitchFamily="34" charset="-122"/>
                 <a:cs typeface="Cambria" pitchFamily="34" charset="-120"/>
               </a:rPr>
-              <a:t>79%</a:t>
+              <a:t>67%</a:t>
             </a:r>
             <a:endParaRPr lang="en-US" sz="3000" dirty="0"/>
           </a:p>
@@ -4617,7 +4617,7 @@
                 <a:ea typeface="Calibri" pitchFamily="34" charset="-122"/>
                 <a:cs typeface="Calibri" pitchFamily="34" charset="-120"/>
               </a:rPr>
-              <a:t>Hit exact optimum (QAOA p=3)</a:t>
+              <a:t>Hit exact optimum (QAOA p=2)</a:t>
             </a:r>
             <a:endParaRPr lang="en-US" sz="1100" dirty="0"/>
           </a:p>
@@ -4656,7 +4656,7 @@
                 <a:ea typeface="Calibri" pitchFamily="34" charset="-122"/>
                 <a:cs typeface="Calibri" pitchFamily="34" charset="-120"/>
               </a:rPr>
-              <a:t>vs greedy 63%</a:t>
+              <a:t>vs greedy 88%</a:t>
             </a:r>
             <a:endParaRPr lang="en-US" sz="1000" dirty="0"/>
           </a:p>
@@ -4761,7 +4761,7 @@
                 <a:ea typeface="Calibri" pitchFamily="34" charset="-122"/>
                 <a:cs typeface="Calibri" pitchFamily="34" charset="-120"/>
               </a:rPr>
-              <a:t>It reaches the exact optimum 79% of the time against the heuristic's 63%, but its worst run is 0.8096 against greedy's 0.9539. That tail drags the pooled mean below greedy. For a bank allocating real capital, the heuristic's predictability is worth more than the extra exact hits — the opposite of what a hit-rate-only table would have told you.</a:t>
+              <a:t>It reaches the exact optimum 67% of the time against the heuristic's 88%, but its worst run is 0.9083 against greedy's 0.9889. That tail drags the pooled mean below greedy. For a bank allocating real capital, the heuristic's predictability is worth more than the extra exact hits — the opposite of what a hit-rate-only table would have told you.</a:t>
             </a:r>
             <a:endParaRPr lang="en-US" sz="1200" dirty="0"/>
           </a:p>
@@ -5110,7 +5110,7 @@
                 <a:ea typeface="Cambria" pitchFamily="34" charset="-122"/>
                 <a:cs typeface="Cambria" pitchFamily="34" charset="-120"/>
               </a:rPr>
-              <a:t>0.0236</a:t>
+              <a:t>0.0211</a:t>
             </a:r>
             <a:endParaRPr lang="en-US" sz="3000" dirty="0"/>
           </a:p>
@@ -5215,7 +5215,7 @@
                 <a:ea typeface="Cambria" pitchFamily="34" charset="-122"/>
                 <a:cs typeface="Cambria" pitchFamily="34" charset="-120"/>
               </a:rPr>
-              <a:t>0.0160</a:t>
+              <a:t>0.0036</a:t>
             </a:r>
             <a:endParaRPr lang="en-US" sz="3000" dirty="0"/>
           </a:p>
@@ -5630,7 +5630,7 @@
                 <a:ea typeface="Cambria" pitchFamily="34" charset="-122"/>
                 <a:cs typeface="Cambria" pitchFamily="34" charset="-120"/>
               </a:rPr>
-              <a:t>7×</a:t>
+              <a:t>1×</a:t>
             </a:r>
             <a:endParaRPr lang="en-US" sz="3000" dirty="0"/>
           </a:p>
@@ -5735,7 +5735,7 @@
                 <a:ea typeface="Cambria" pitchFamily="34" charset="-122"/>
                 <a:cs typeface="Cambria" pitchFamily="34" charset="-120"/>
               </a:rPr>
-              <a:t>220</a:t>
+              <a:t>8</a:t>
             </a:r>
             <a:endParaRPr lang="en-US" sz="3000" dirty="0"/>
           </a:p>
@@ -5813,7 +5813,7 @@
                 <a:ea typeface="Calibri" pitchFamily="34" charset="-122"/>
                 <a:cs typeface="Calibri" pitchFamily="34" charset="-120"/>
               </a:rPr>
-              <a:t>~19 h of simulation</a:t>
+              <a:t>~1 h of simulation</a:t>
             </a:r>
             <a:endParaRPr lang="en-US" sz="1000" dirty="0"/>
           </a:p>

--- a/PRESENTATION.pptx
+++ b/PRESENTATION.pptx
@@ -1037,7 +1037,7 @@
           <a:p>
             <a:r>
               <a:rPr lang="en-US" dirty="0"/>
-              <a:t>We found this because our first table showed noise making QAOA BETTER, which is impossible -- so the metric had to be wrong. Anyone reporting that their variational circuit shrugged off 2% gate error is probably reading the same statistic.</a:t>
+              <a:t>Two retractions live on this slide. First: an early table showed noise making QAOA better, which is impossible -- the metric was wrong, and we fixed it. Second: at 3 seeds best-of-N looked provably noise-blind, and at 12 seeds that claim did not survive, so we removed it. Say both out loud; it is the strongest evidence that the rest of our numbers are trustworthy.</a:t>
             </a:r>
             <a:endParaRPr lang="en-US" dirty="0"/>
           </a:p>
@@ -5423,7 +5423,7 @@
                 <a:ea typeface="Calibri" pitchFamily="34" charset="-122"/>
                 <a:cs typeface="Calibri" pitchFamily="34" charset="-120"/>
               </a:rPr>
-              <a:t>AND THE METRIC THAT LIED TO US</a:t>
+              <a:t>WE MEASURED, AND CANNOT SAY</a:t>
             </a:r>
             <a:endParaRPr lang="en-US" sz="1100" dirty="0"/>
           </a:p>
@@ -5501,7 +5501,7 @@
         <p:spPr>
           <a:xfrm>
             <a:off x="6858000" y="1627632"/>
-            <a:ext cx="4754880" cy="329184"/>
+            <a:ext cx="4754880" cy="475488"/>
           </a:xfrm>
           <a:prstGeom prst="rect">
             <a:avLst/>
@@ -5525,7 +5525,7 @@
                 <a:ea typeface="Calibri" pitchFamily="34" charset="-122"/>
                 <a:cs typeface="Calibri" pitchFamily="34" charset="-120"/>
               </a:rPr>
-              <a:t>Best-of-2048-shots says yes. It is wrong.</a:t>
+              <a:t>Our sweep cannot tell you -- and that is the finding.</a:t>
             </a:r>
             <a:endParaRPr lang="en-US" sz="1400" dirty="0"/>
           </a:p>
@@ -5539,24 +5539,24 @@
         </p:nvSpPr>
         <p:spPr>
           <a:xfrm>
-            <a:off x="6858000" y="2029968"/>
-            <a:ext cx="4754880" cy="1371600"/>
-          </a:xfrm>
-          <a:prstGeom prst="rect">
-            <a:avLst/>
-          </a:prstGeom>
-          <a:noFill/>
-          <a:ln/>
-        </p:spPr>
-        <p:txBody>
-          <a:bodyPr wrap="square" lIns="0" tIns="0" rIns="0" bIns="0" rtlCol="0" anchor="ctr"/>
-          <a:lstStyle/>
-          <a:p>
-            <a:pPr indent="0" marL="0">
-              <a:buNone/>
-            </a:pPr>
-            <a:r>
-              <a:rPr lang="en-US" sz="1150" dirty="0">
+            <a:off x="6858000" y="2176272"/>
+            <a:ext cx="4754880" cy="1280160"/>
+          </a:xfrm>
+          <a:prstGeom prst="rect">
+            <a:avLst/>
+          </a:prstGeom>
+          <a:noFill/>
+          <a:ln/>
+        </p:spPr>
+        <p:txBody>
+          <a:bodyPr wrap="square" lIns="0" tIns="0" rIns="0" bIns="0" rtlCol="0" anchor="ctr"/>
+          <a:lstStyle/>
+          <a:p>
+            <a:pPr indent="0" marL="0">
+              <a:buNone/>
+            </a:pPr>
+            <a:r>
+              <a:rPr lang="en-US" sz="1100" dirty="0">
                 <a:solidFill>
                   <a:srgbClr val="5A5A6E"/>
                 </a:solidFill>
@@ -5564,9 +5564,9 @@
                 <a:ea typeface="Calibri" pitchFamily="34" charset="-122"/>
                 <a:cs typeface="Calibri" pitchFamily="34" charset="-120"/>
               </a:rPr>
-              <a:t>The default readout returns the exact optimum even at 2% depolarizing error across 182 two-qubit gates — a regime where no coherent signal should survive. At 12 qubits a near-uniform distribution still lands on the optimum by chance within 2048 draws. That is an artifact of the statistic, not robustness of the algorithm.</a:t>
-            </a:r>
-            <a:endParaRPr lang="en-US" sz="1150" dirty="0"/>
+              <a:t>The scatter within one error level across seeds is several times larger than the spread between levels, so there is no degradation curve we are entitled to draw. Worse: our 3-seed pilot estimated ~8 seeds would settle it. At 12 seeds the scatter came out 2.5x larger than the pilot thought, and the requirement jumped to ~104. The power calculation was itself under-powered.</a:t>
+            </a:r>
+            <a:endParaRPr lang="en-US" sz="1100" dirty="0"/>
           </a:p>
         </p:txBody>
       </p:sp>
@@ -5630,7 +5630,7 @@
                 <a:ea typeface="Cambria" pitchFamily="34" charset="-122"/>
                 <a:cs typeface="Cambria" pitchFamily="34" charset="-120"/>
               </a:rPr>
-              <a:t>1×</a:t>
+              <a:t>5×</a:t>
             </a:r>
             <a:endParaRPr lang="en-US" sz="3000" dirty="0"/>
           </a:p>
@@ -5735,7 +5735,7 @@
                 <a:ea typeface="Cambria" pitchFamily="34" charset="-122"/>
                 <a:cs typeface="Cambria" pitchFamily="34" charset="-120"/>
               </a:rPr>
-              <a:t>8</a:t>
+              <a:t>104</a:t>
             </a:r>
             <a:endParaRPr lang="en-US" sz="3000" dirty="0"/>
           </a:p>
@@ -5813,7 +5813,7 @@
                 <a:ea typeface="Calibri" pitchFamily="34" charset="-122"/>
                 <a:cs typeface="Calibri" pitchFamily="34" charset="-120"/>
               </a:rPr>
-              <a:t>~1 h of simulation</a:t>
+              <a:t>~8 h of simulation</a:t>
             </a:r>
             <a:endParaRPr lang="en-US" sz="1000" dirty="0"/>
           </a:p>

--- a/PRESENTATION.pptx
+++ b/PRESENTATION.pptx
@@ -2684,7 +2684,7 @@
                 <a:ea typeface="Calibri" pitchFamily="34" charset="-122"/>
                 <a:cs typeface="Calibri" pitchFamily="34" charset="-120"/>
               </a:rPr>
-              <a:t>German Credit</a:t>
+              <a:t>Taiwan card data</a:t>
             </a:r>
             <a:endParaRPr lang="en-US" sz="1350" dirty="0"/>
           </a:p>
@@ -2723,7 +2723,7 @@
                 <a:ea typeface="Calibri" pitchFamily="34" charset="-122"/>
                 <a:cs typeface="Calibri" pitchFamily="34" charset="-120"/>
               </a:rPr>
-              <a:t>1,000 real applicants</a:t>
+              <a:t>30,000 accounts</a:t>
             </a:r>
             <a:endParaRPr lang="en-US" sz="1050" dirty="0"/>
           </a:p>
@@ -2740,7 +2740,7 @@
                 <a:ea typeface="Calibri" pitchFamily="34" charset="-122"/>
                 <a:cs typeface="Calibri" pitchFamily="34" charset="-120"/>
               </a:rPr>
-              <a:t>UCI Statlog</a:t>
+              <a:t>UCI, 2005</a:t>
             </a:r>
             <a:endParaRPr lang="en-US" sz="1050" dirty="0"/>
           </a:p>
@@ -2884,7 +2884,7 @@
                 <a:ea typeface="Calibri" pitchFamily="34" charset="-122"/>
                 <a:cs typeface="Calibri" pitchFamily="34" charset="-120"/>
               </a:rPr>
-              <a:t>P(default) per applicant</a:t>
+              <a:t>P(default) per account</a:t>
             </a:r>
             <a:endParaRPr lang="en-US" sz="1050" dirty="0"/>
           </a:p>
@@ -3797,7 +3797,7 @@
                 <a:ea typeface="Calibri" pitchFamily="34" charset="-122"/>
                 <a:cs typeface="Calibri" pitchFamily="34" charset="-120"/>
               </a:rPr>
-              <a:t>Fairness weight → approval-rate gap closes from −42% to −2.9%, and we can price it.</a:t>
+              <a:t>Fairness weight → approval-rate gap closes from 0.28 to 0.03, and we can price it.</a:t>
             </a:r>
             <a:endParaRPr lang="en-US" sz="1200" dirty="0"/>
           </a:p>
@@ -3876,7 +3876,7 @@
               <a:buNone/>
             </a:pPr>
             <a:r>
-              <a:rPr lang="en-US" sz="1700" b="1" dirty="0">
+              <a:rPr lang="en-US" sz="2000" b="1" dirty="0">
                 <a:solidFill>
                   <a:srgbClr val="1E2761"/>
                 </a:solidFill>
@@ -3884,9 +3884,9 @@
                 <a:ea typeface="Cambria" pitchFamily="34" charset="-122"/>
                 <a:cs typeface="Cambria" pitchFamily="34" charset="-120"/>
               </a:rPr>
-              <a:t>−42% → −2.9%</a:t>
-            </a:r>
-            <a:endParaRPr lang="en-US" sz="1700" dirty="0"/>
+              <a:t>0.28 → 0.03</a:t>
+            </a:r>
+            <a:endParaRPr lang="en-US" sz="2000" dirty="0"/>
           </a:p>
         </p:txBody>
       </p:sp>
@@ -4094,7 +4094,7 @@
                 <a:ea typeface="Calibri" pitchFamily="34" charset="-122"/>
                 <a:cs typeface="Calibri" pitchFamily="34" charset="-120"/>
               </a:rPr>
-              <a:t>We do not claim the model is fair. We claim we can put parity in the objective and tell you what it costs in Deutschmarks.</a:t>
+              <a:t>We do not claim the model is fair. We claim we can put parity in the objective and tell you what it costs -- about 4% of profit.</a:t>
             </a:r>
             <a:endParaRPr lang="en-US" sz="1150" dirty="0"/>
           </a:p>
@@ -6067,7 +6067,7 @@
                 <a:ea typeface="Calibri" pitchFamily="34" charset="-122"/>
                 <a:cs typeface="Calibri" pitchFamily="34" charset="-120"/>
               </a:rPr>
-              <a:t>Calibrated GBM on 1,000 real applicants. Logistic regression beats it — we report that.</a:t>
+              <a:t>Calibrated GBM on 30,000 real accounts, AUC 0.78. Beats logistic regression here -- reversed on small data.</a:t>
             </a:r>
             <a:endParaRPr lang="en-US" sz="1250" dirty="0"/>
           </a:p>
